--- a/public/templates/office/EMP_IMP_010_시스템이행계획서.pptx
+++ b/public/templates/office/EMP_IMP_010_시스템이행계획서.pptx
@@ -4912,7 +4912,7 @@
                         </a:defRPr>
                       </a:pPr>
                       <a:r>
-                        <a:t>010-XXXX-1001</a:t>
+                        <a:t>010-2026-1001</a:t>
                       </a:r>
                     </a:p>
                   </a:txBody>
@@ -5029,7 +5029,7 @@
                         </a:defRPr>
                       </a:pPr>
                       <a:r>
-                        <a:t>010-XXXX-2002</a:t>
+                        <a:t>010-2026-2002</a:t>
                       </a:r>
                     </a:p>
                   </a:txBody>

--- a/public/templates/office/EMP_IMP_010_시스템이행계획서.pptx
+++ b/public/templates/office/EMP_IMP_010_시스템이행계획서.pptx
@@ -3168,7 +3168,7 @@
               </a:defRPr>
             </a:pPr>
             <a:r>
-              <a:t>HANBIT GLOBAL SyncGuard AI</a:t>
+              <a:t>HANBIT GLOBAL SyncFlow AI</a:t>
             </a:r>
           </a:p>
           <a:p>
@@ -3198,7 +3198,7 @@
               </a:defRPr>
             </a:pPr>
             <a:r>
-              <a:t>한빛글로벌 AI 심의 시스템 상용 배포, 데이터 전환, 롤백 및 안정화 가이드</a:t>
+              <a:t>한빛글로벌 AI 검증 시스템 상용 배포, 데이터 전환, 롤백 및 안정화 가이드</a:t>
             </a:r>
           </a:p>
         </p:txBody>
@@ -3218,11 +3218,11 @@
             <a:avLst/>
           </a:prstGeom>
           <a:solidFill>
-            <a:srgbClr val="1E293B"/>
+            <a:srgbClr val="0F2942"/>
           </a:solidFill>
           <a:ln>
             <a:solidFill>
-              <a:srgbClr val="334155"/>
+              <a:srgbClr val="1E3A5F"/>
             </a:solidFill>
           </a:ln>
         </p:spPr>
@@ -3400,7 +3400,7 @@
               </a:defRPr>
             </a:pPr>
             <a:r>
-              <a:t>SyncGuard AI 시스템 이행계획서  &gt;  1. 이행 개요</a:t>
+              <a:t>SyncFlow AI 시스템 이행계획서  &gt;  1. 이행 개요</a:t>
             </a:r>
           </a:p>
         </p:txBody>
@@ -3465,7 +3465,7 @@
             <a:pPr algn="r">
               <a:defRPr sz="1000" b="1">
                 <a:solidFill>
-                  <a:srgbClr val="1E293B"/>
+                  <a:srgbClr val="0F2942"/>
                 </a:solidFill>
               </a:defRPr>
             </a:pPr>
@@ -3550,7 +3550,7 @@
               </a:defRPr>
             </a:pPr>
             <a:r>
-              <a:t>SyncGuard AI | 시스템 오픈 및 상용 전환 이행계획서</a:t>
+              <a:t>SyncFlow AI | 시스템 오픈 및 상용 전환 이행계획서</a:t>
             </a:r>
           </a:p>
         </p:txBody>
@@ -3721,7 +3721,7 @@
               </a:spcBef>
               <a:defRPr sz="950">
                 <a:solidFill>
-                  <a:srgbClr val="334155"/>
+                  <a:srgbClr val="1E3A5F"/>
                 </a:solidFill>
               </a:defRPr>
             </a:pPr>
@@ -3839,7 +3839,7 @@
               </a:spcBef>
               <a:defRPr sz="950">
                 <a:solidFill>
-                  <a:srgbClr val="334155"/>
+                  <a:srgbClr val="1E3A5F"/>
                 </a:solidFill>
               </a:defRPr>
             </a:pPr>
@@ -3848,7 +3848,7 @@
             </a:r>
             <a:br/>
             <a:r>
-              <a:t>식약처 법령 벡터 DB 100% 정합성 검증</a:t>
+              <a:t>공정위·표준원 법령 벡터 DB 100% 정합성 검증</a:t>
             </a:r>
             <a:br/>
             <a:r>
@@ -3957,16 +3957,16 @@
               </a:spcBef>
               <a:defRPr sz="950">
                 <a:solidFill>
-                  <a:srgbClr val="334155"/>
-                </a:solidFill>
-              </a:defRPr>
-            </a:pPr>
-            <a:r>
-              <a:t>ProductLab 원료 규격 REST API</a:t>
+                  <a:srgbClr val="1E3A5F"/>
+                </a:solidFill>
+              </a:defRPr>
+            </a:pPr>
+            <a:r>
+              <a:t>PLM-Nexus 원소재 규격 REST API</a:t>
             </a:r>
             <a:br/>
             <a:r>
-              <a:t>MarketingHub 결재 동기화</a:t>
+              <a:t>SRM-Portal 결재 동기화</a:t>
             </a:r>
             <a:br/>
             <a:r>
@@ -4075,7 +4075,7 @@
               </a:spcBef>
               <a:defRPr sz="950">
                 <a:solidFill>
-                  <a:srgbClr val="334155"/>
+                  <a:srgbClr val="1E3A5F"/>
                 </a:solidFill>
               </a:defRPr>
             </a:pPr>
@@ -4088,7 +4088,7 @@
             </a:r>
             <a:br/>
             <a:r>
-              <a:t>비상 시 수동 심의 프로세스 즉시 가동</a:t>
+              <a:t>비상 시 수동 검증 프로세스 즉시 가동</a:t>
             </a:r>
           </a:p>
         </p:txBody>
@@ -4178,7 +4178,7 @@
               </a:spcBef>
               <a:defRPr sz="950">
                 <a:solidFill>
-                  <a:srgbClr val="334155"/>
+                  <a:srgbClr val="1E3A5F"/>
                 </a:solidFill>
               </a:defRPr>
             </a:pPr>
@@ -4193,12 +4193,12 @@
               </a:spcBef>
               <a:defRPr sz="950">
                 <a:solidFill>
-                  <a:srgbClr val="334155"/>
-                </a:solidFill>
-              </a:defRPr>
-            </a:pPr>
-            <a:r>
-              <a:t>• 역할과 책임 명확화: 한빛글로벌 RA팀(업무 승인), IT운영팀(인프라/방화벽), 엠파시(사업 총괄 및 AI 파이프라인/배포) 공조 체계 확립.</a:t>
+                  <a:srgbClr val="1E3A5F"/>
+                </a:solidFill>
+              </a:defRPr>
+            </a:pPr>
+            <a:r>
+              <a:t>• 역할과 책임 명확화: 한빛글로벌 QA팀(업무 승인), IT운영팀(인프라/방화벽), 엠파시(사업 총괄 및 AI 파이프라인/배포) 공조 체계 확립.</a:t>
             </a:r>
           </a:p>
           <a:p>
@@ -4208,7 +4208,7 @@
               </a:spcBef>
               <a:defRPr sz="950">
                 <a:solidFill>
-                  <a:srgbClr val="334155"/>
+                  <a:srgbClr val="1E3A5F"/>
                 </a:solidFill>
               </a:defRPr>
             </a:pPr>
@@ -4223,7 +4223,7 @@
               </a:spcBef>
               <a:defRPr sz="950">
                 <a:solidFill>
-                  <a:srgbClr val="334155"/>
+                  <a:srgbClr val="1E3A5F"/>
                 </a:solidFill>
               </a:defRPr>
             </a:pPr>
@@ -4326,7 +4326,7 @@
               </a:defRPr>
             </a:pPr>
             <a:r>
-              <a:t>SyncGuard AI 시스템 이행계획서  &gt;  2. 추진 조직 및 체계</a:t>
+              <a:t>SyncFlow AI 시스템 이행계획서  &gt;  2. 추진 조직 및 체계</a:t>
             </a:r>
           </a:p>
         </p:txBody>
@@ -4391,7 +4391,7 @@
             <a:pPr algn="r">
               <a:defRPr sz="1000" b="1">
                 <a:solidFill>
-                  <a:srgbClr val="1E293B"/>
+                  <a:srgbClr val="0F2942"/>
                 </a:solidFill>
               </a:defRPr>
             </a:pPr>
@@ -4476,7 +4476,7 @@
               </a:defRPr>
             </a:pPr>
             <a:r>
-              <a:t>SyncGuard AI | 시스템 오픈 및 상용 전환 이행계획서</a:t>
+              <a:t>SyncFlow AI | 시스템 오픈 및 상용 전환 이행계획서</a:t>
             </a:r>
           </a:p>
         </p:txBody>
@@ -4721,7 +4721,7 @@
                       <a:pPr>
                         <a:defRPr sz="950">
                           <a:solidFill>
-                            <a:srgbClr val="334155"/>
+                            <a:srgbClr val="1E3A5F"/>
                           </a:solidFill>
                         </a:defRPr>
                       </a:pPr>
@@ -4744,7 +4744,7 @@
                       <a:pPr>
                         <a:defRPr sz="950">
                           <a:solidFill>
-                            <a:srgbClr val="334155"/>
+                            <a:srgbClr val="1E3A5F"/>
                           </a:solidFill>
                         </a:defRPr>
                       </a:pPr>
@@ -4767,12 +4767,12 @@
                       <a:pPr algn="ctr">
                         <a:defRPr sz="950">
                           <a:solidFill>
-                            <a:srgbClr val="334155"/>
+                            <a:srgbClr val="1E3A5F"/>
                           </a:solidFill>
                         </a:defRPr>
                       </a:pPr>
                       <a:r>
-                        <a:t>한빛글로벌 RA팀</a:t>
+                        <a:t>한빛글로벌 QA팀</a:t>
                       </a:r>
                     </a:p>
                   </a:txBody>
@@ -4790,7 +4790,7 @@
                       <a:pPr algn="ctr">
                         <a:defRPr sz="950">
                           <a:solidFill>
-                            <a:srgbClr val="334155"/>
+                            <a:srgbClr val="1E3A5F"/>
                           </a:solidFill>
                         </a:defRPr>
                       </a:pPr>
@@ -4838,7 +4838,7 @@
                       <a:pPr>
                         <a:defRPr sz="950">
                           <a:solidFill>
-                            <a:srgbClr val="334155"/>
+                            <a:srgbClr val="1E3A5F"/>
                           </a:solidFill>
                         </a:defRPr>
                       </a:pPr>
@@ -4861,7 +4861,7 @@
                       <a:pPr>
                         <a:defRPr sz="950">
                           <a:solidFill>
-                            <a:srgbClr val="334155"/>
+                            <a:srgbClr val="1E3A5F"/>
                           </a:solidFill>
                         </a:defRPr>
                       </a:pPr>
@@ -4884,7 +4884,7 @@
                       <a:pPr algn="ctr">
                         <a:defRPr sz="950">
                           <a:solidFill>
-                            <a:srgbClr val="334155"/>
+                            <a:srgbClr val="1E3A5F"/>
                           </a:solidFill>
                         </a:defRPr>
                       </a:pPr>
@@ -4907,7 +4907,7 @@
                       <a:pPr algn="ctr">
                         <a:defRPr sz="950">
                           <a:solidFill>
-                            <a:srgbClr val="334155"/>
+                            <a:srgbClr val="1E3A5F"/>
                           </a:solidFill>
                         </a:defRPr>
                       </a:pPr>
@@ -4955,7 +4955,7 @@
                       <a:pPr>
                         <a:defRPr sz="950">
                           <a:solidFill>
-                            <a:srgbClr val="334155"/>
+                            <a:srgbClr val="1E3A5F"/>
                           </a:solidFill>
                         </a:defRPr>
                       </a:pPr>
@@ -4978,7 +4978,7 @@
                       <a:pPr>
                         <a:defRPr sz="950">
                           <a:solidFill>
-                            <a:srgbClr val="334155"/>
+                            <a:srgbClr val="1E3A5F"/>
                           </a:solidFill>
                         </a:defRPr>
                       </a:pPr>
@@ -5001,7 +5001,7 @@
                       <a:pPr algn="ctr">
                         <a:defRPr sz="950">
                           <a:solidFill>
-                            <a:srgbClr val="334155"/>
+                            <a:srgbClr val="1E3A5F"/>
                           </a:solidFill>
                         </a:defRPr>
                       </a:pPr>
@@ -5024,7 +5024,7 @@
                       <a:pPr algn="ctr">
                         <a:defRPr sz="950">
                           <a:solidFill>
-                            <a:srgbClr val="334155"/>
+                            <a:srgbClr val="1E3A5F"/>
                           </a:solidFill>
                         </a:defRPr>
                       </a:pPr>
@@ -5072,7 +5072,7 @@
                       <a:pPr>
                         <a:defRPr sz="950">
                           <a:solidFill>
-                            <a:srgbClr val="334155"/>
+                            <a:srgbClr val="1E3A5F"/>
                           </a:solidFill>
                         </a:defRPr>
                       </a:pPr>
@@ -5095,12 +5095,12 @@
                       <a:pPr>
                         <a:defRPr sz="950">
                           <a:solidFill>
-                            <a:srgbClr val="334155"/>
+                            <a:srgbClr val="1E3A5F"/>
                           </a:solidFill>
                         </a:defRPr>
                       </a:pPr>
                       <a:r>
-                        <a:t>ProductLab 연계 포트 오픈, SSO 인증 연동, LB 헬스체크</a:t>
+                        <a:t>PLM-Nexus 연계 포트 오픈, SSO 인증 연동, LB 헬스체크</a:t>
                       </a:r>
                     </a:p>
                   </a:txBody>
@@ -5118,7 +5118,7 @@
                       <a:pPr algn="ctr">
                         <a:defRPr sz="950">
                           <a:solidFill>
-                            <a:srgbClr val="334155"/>
+                            <a:srgbClr val="1E3A5F"/>
                           </a:solidFill>
                         </a:defRPr>
                       </a:pPr>
@@ -5141,7 +5141,7 @@
                       <a:pPr algn="ctr">
                         <a:defRPr sz="950">
                           <a:solidFill>
-                            <a:srgbClr val="334155"/>
+                            <a:srgbClr val="1E3A5F"/>
                           </a:solidFill>
                         </a:defRPr>
                       </a:pPr>
@@ -5254,7 +5254,7 @@
               </a:defRPr>
             </a:pPr>
             <a:r>
-              <a:t>SyncGuard AI 시스템 이행계획서  &gt;  3. 컷오버 시나리오</a:t>
+              <a:t>SyncFlow AI 시스템 이행계획서  &gt;  3. 컷오버 시나리오</a:t>
             </a:r>
           </a:p>
         </p:txBody>
@@ -5319,7 +5319,7 @@
             <a:pPr algn="r">
               <a:defRPr sz="1000" b="1">
                 <a:solidFill>
-                  <a:srgbClr val="1E293B"/>
+                  <a:srgbClr val="0F2942"/>
                 </a:solidFill>
               </a:defRPr>
             </a:pPr>
@@ -5404,7 +5404,7 @@
               </a:defRPr>
             </a:pPr>
             <a:r>
-              <a:t>SyncGuard AI | 시스템 오픈 및 상용 전환 이행계획서</a:t>
+              <a:t>SyncFlow AI | 시스템 오픈 및 상용 전환 이행계획서</a:t>
             </a:r>
           </a:p>
         </p:txBody>
@@ -5649,7 +5649,7 @@
                       <a:pPr>
                         <a:defRPr sz="950">
                           <a:solidFill>
-                            <a:srgbClr val="334155"/>
+                            <a:srgbClr val="1E3A5F"/>
                           </a:solidFill>
                         </a:defRPr>
                       </a:pPr>
@@ -5672,7 +5672,7 @@
                       <a:pPr>
                         <a:defRPr sz="950">
                           <a:solidFill>
-                            <a:srgbClr val="334155"/>
+                            <a:srgbClr val="1E3A5F"/>
                           </a:solidFill>
                         </a:defRPr>
                       </a:pPr>
@@ -5695,7 +5695,7 @@
                       <a:pPr algn="ctr">
                         <a:defRPr sz="950">
                           <a:solidFill>
-                            <a:srgbClr val="334155"/>
+                            <a:srgbClr val="1E3A5F"/>
                           </a:solidFill>
                         </a:defRPr>
                       </a:pPr>
@@ -5766,7 +5766,7 @@
                       <a:pPr>
                         <a:defRPr sz="950">
                           <a:solidFill>
-                            <a:srgbClr val="334155"/>
+                            <a:srgbClr val="1E3A5F"/>
                           </a:solidFill>
                         </a:defRPr>
                       </a:pPr>
@@ -5789,12 +5789,12 @@
                       <a:pPr>
                         <a:defRPr sz="950">
                           <a:solidFill>
-                            <a:srgbClr val="334155"/>
+                            <a:srgbClr val="1E3A5F"/>
                           </a:solidFill>
                         </a:defRPr>
                       </a:pPr>
                       <a:r>
-                        <a:t>마스터 DDL 적용, 100개 룰셋 및 식약처 가이드라인 DB 시딩 적재</a:t>
+                        <a:t>마스터 DDL 적용, 100개 룰셋 및 공정위·표준원 가이드라인 DB 시딩 적재</a:t>
                       </a:r>
                     </a:p>
                   </a:txBody>
@@ -5812,7 +5812,7 @@
                       <a:pPr algn="ctr">
                         <a:defRPr sz="950">
                           <a:solidFill>
-                            <a:srgbClr val="334155"/>
+                            <a:srgbClr val="1E3A5F"/>
                           </a:solidFill>
                         </a:defRPr>
                       </a:pPr>
@@ -5883,7 +5883,7 @@
                       <a:pPr>
                         <a:defRPr sz="950">
                           <a:solidFill>
-                            <a:srgbClr val="334155"/>
+                            <a:srgbClr val="1E3A5F"/>
                           </a:solidFill>
                         </a:defRPr>
                       </a:pPr>
@@ -5906,7 +5906,7 @@
                       <a:pPr>
                         <a:defRPr sz="950">
                           <a:solidFill>
-                            <a:srgbClr val="334155"/>
+                            <a:srgbClr val="1E3A5F"/>
                           </a:solidFill>
                         </a:defRPr>
                       </a:pPr>
@@ -5929,7 +5929,7 @@
                       <a:pPr algn="ctr">
                         <a:defRPr sz="950">
                           <a:solidFill>
-                            <a:srgbClr val="334155"/>
+                            <a:srgbClr val="1E3A5F"/>
                           </a:solidFill>
                         </a:defRPr>
                       </a:pPr>
@@ -6000,7 +6000,7 @@
                       <a:pPr>
                         <a:defRPr sz="950">
                           <a:solidFill>
-                            <a:srgbClr val="334155"/>
+                            <a:srgbClr val="1E3A5F"/>
                           </a:solidFill>
                         </a:defRPr>
                       </a:pPr>
@@ -6023,12 +6023,12 @@
                       <a:pPr>
                         <a:defRPr sz="950">
                           <a:solidFill>
-                            <a:srgbClr val="334155"/>
+                            <a:srgbClr val="1E3A5F"/>
                           </a:solidFill>
                         </a:defRPr>
                       </a:pPr>
                       <a:r>
-                        <a:t>ProductLab 원료 규격, MarketingHub 결재 연동, SSO 로그인, SMS 통지 테스트</a:t>
+                        <a:t>PLM-Nexus 원소재 규격, SRM-Portal 결재 연동, SSO 로그인, SMS 통지 테스트</a:t>
                       </a:r>
                     </a:p>
                   </a:txBody>
@@ -6046,7 +6046,7 @@
                       <a:pPr algn="ctr">
                         <a:defRPr sz="950">
                           <a:solidFill>
-                            <a:srgbClr val="334155"/>
+                            <a:srgbClr val="1E3A5F"/>
                           </a:solidFill>
                         </a:defRPr>
                       </a:pPr>
@@ -6117,7 +6117,7 @@
                       <a:pPr>
                         <a:defRPr sz="950">
                           <a:solidFill>
-                            <a:srgbClr val="334155"/>
+                            <a:srgbClr val="1E3A5F"/>
                           </a:solidFill>
                         </a:defRPr>
                       </a:pPr>
@@ -6140,7 +6140,7 @@
                       <a:pPr>
                         <a:defRPr sz="950">
                           <a:solidFill>
-                            <a:srgbClr val="334155"/>
+                            <a:srgbClr val="1E3A5F"/>
                           </a:solidFill>
                         </a:defRPr>
                       </a:pPr>
@@ -6163,7 +6163,7 @@
                       <a:pPr algn="ctr">
                         <a:defRPr sz="950">
                           <a:solidFill>
-                            <a:srgbClr val="334155"/>
+                            <a:srgbClr val="1E3A5F"/>
                           </a:solidFill>
                         </a:defRPr>
                       </a:pPr>
@@ -6299,7 +6299,7 @@
               </a:defRPr>
             </a:pPr>
             <a:r>
-              <a:t>SyncGuard AI 시스템 이행계획서  &gt;  4. 배포 아키텍처</a:t>
+              <a:t>SyncFlow AI 시스템 이행계획서  &gt;  4. 배포 아키텍처</a:t>
             </a:r>
           </a:p>
         </p:txBody>
@@ -6364,7 +6364,7 @@
             <a:pPr algn="r">
               <a:defRPr sz="1000" b="1">
                 <a:solidFill>
-                  <a:srgbClr val="1E293B"/>
+                  <a:srgbClr val="0F2942"/>
                 </a:solidFill>
               </a:defRPr>
             </a:pPr>
@@ -6449,7 +6449,7 @@
               </a:defRPr>
             </a:pPr>
             <a:r>
-              <a:t>SyncGuard AI | 시스템 오픈 및 상용 전환 이행계획서</a:t>
+              <a:t>SyncFlow AI | 시스템 오픈 및 상용 전환 이행계획서</a:t>
             </a:r>
           </a:p>
         </p:txBody>
@@ -6605,7 +6605,7 @@
               </a:spcBef>
               <a:defRPr sz="950">
                 <a:solidFill>
-                  <a:srgbClr val="334155"/>
+                  <a:srgbClr val="1E3A5F"/>
                 </a:solidFill>
               </a:defRPr>
             </a:pPr>
@@ -6620,7 +6620,7 @@
               </a:spcBef>
               <a:defRPr sz="950">
                 <a:solidFill>
-                  <a:srgbClr val="334155"/>
+                  <a:srgbClr val="1E3A5F"/>
                 </a:solidFill>
               </a:defRPr>
             </a:pPr>
@@ -6635,7 +6635,7 @@
               </a:spcBef>
               <a:defRPr sz="950">
                 <a:solidFill>
-                  <a:srgbClr val="334155"/>
+                  <a:srgbClr val="1E3A5F"/>
                 </a:solidFill>
               </a:defRPr>
             </a:pPr>
@@ -6650,7 +6650,7 @@
               </a:spcBef>
               <a:defRPr sz="950">
                 <a:solidFill>
-                  <a:srgbClr val="334155"/>
+                  <a:srgbClr val="1E3A5F"/>
                 </a:solidFill>
               </a:defRPr>
             </a:pPr>
@@ -6745,7 +6745,7 @@
               </a:spcBef>
               <a:defRPr sz="950">
                 <a:solidFill>
-                  <a:srgbClr val="334155"/>
+                  <a:srgbClr val="1E3A5F"/>
                 </a:solidFill>
               </a:defRPr>
             </a:pPr>
@@ -6760,12 +6760,12 @@
               </a:spcBef>
               <a:defRPr sz="950">
                 <a:solidFill>
-                  <a:srgbClr val="334155"/>
-                </a:solidFill>
-              </a:defRPr>
-            </a:pPr>
-            <a:r>
-              <a:t>• 영상 피크프레임·미세각주 자동 추출 &amp; 네이버/패들 선택형 OCR</a:t>
+                  <a:srgbClr val="1E3A5F"/>
+                </a:solidFill>
+              </a:defRPr>
+            </a:pPr>
+            <a:r>
+              <a:t>• 도면 핵심규격·특약주석 자동 추출 &amp; 엔터프라이즈 비전/패들 선택형 OCR</a:t>
             </a:r>
           </a:p>
           <a:p>
@@ -6775,12 +6775,12 @@
               </a:spcBef>
               <a:defRPr sz="950">
                 <a:solidFill>
-                  <a:srgbClr val="334155"/>
-                </a:solidFill>
-              </a:defRPr>
-            </a:pPr>
-            <a:r>
-              <a:t>• 규칙 사전 100대 룰셋 &amp; 과거 심의 이력 상충 탐지 엔진</a:t>
+                  <a:srgbClr val="1E3A5F"/>
+                </a:solidFill>
+              </a:defRPr>
+            </a:pPr>
+            <a:r>
+              <a:t>• 규칙 사전 100대 룰셋 &amp; 과거 검증 이력 상충 탐지 엔진</a:t>
             </a:r>
           </a:p>
           <a:p>
@@ -6790,12 +6790,12 @@
               </a:spcBef>
               <a:defRPr sz="950">
                 <a:solidFill>
-                  <a:srgbClr val="334155"/>
-                </a:solidFill>
-              </a:defRPr>
-            </a:pPr>
-            <a:r>
-              <a:t>• Batch(:18084) 매일 02:00 ProductLab·02:30 KT레몬 일배치</a:t>
+                  <a:srgbClr val="1E3A5F"/>
+                </a:solidFill>
+              </a:defRPr>
+            </a:pPr>
+            <a:r>
+              <a:t>• Batch(:18084) 매일 02:00 PLM-Nexus·02:30 HB-Monitor 일배치</a:t>
             </a:r>
           </a:p>
         </p:txBody>
@@ -6885,7 +6885,7 @@
               </a:spcBef>
               <a:defRPr sz="950">
                 <a:solidFill>
-                  <a:srgbClr val="334155"/>
+                  <a:srgbClr val="1E3A5F"/>
                 </a:solidFill>
               </a:defRPr>
             </a:pPr>
@@ -6900,7 +6900,7 @@
               </a:spcBef>
               <a:defRPr sz="950">
                 <a:solidFill>
-                  <a:srgbClr val="334155"/>
+                  <a:srgbClr val="1E3A5F"/>
                 </a:solidFill>
               </a:defRPr>
             </a:pPr>
@@ -6915,12 +6915,12 @@
               </a:spcBef>
               <a:defRPr sz="950">
                 <a:solidFill>
-                  <a:srgbClr val="334155"/>
-                </a:solidFill>
-              </a:defRPr>
-            </a:pPr>
-            <a:r>
-              <a:t>• AWS S3 전용 버킷 (300MB 시안·영상·피크프레임·리포트 보관)</a:t>
+                  <a:srgbClr val="1E3A5F"/>
+                </a:solidFill>
+              </a:defRPr>
+            </a:pPr>
+            <a:r>
+              <a:t>• AWS S3 전용 버킷 (300MB 계약·도서·영상·도면스냅샷·리포트 보관)</a:t>
             </a:r>
           </a:p>
           <a:p>
@@ -6930,12 +6930,12 @@
               </a:spcBef>
               <a:defRPr sz="950">
                 <a:solidFill>
-                  <a:srgbClr val="334155"/>
-                </a:solidFill>
-              </a:defRPr>
-            </a:pPr>
-            <a:r>
-              <a:t>• 불변 감사 원장(review_history_immutable, WORM 해시체인)</a:t>
+                  <a:srgbClr val="1E3A5F"/>
+                </a:solidFill>
+              </a:defRPr>
+            </a:pPr>
+            <a:r>
+              <a:t>• 불변 감사 원장(verify_history_immutable, WORM 해시체인)</a:t>
             </a:r>
           </a:p>
         </p:txBody>
@@ -7025,12 +7025,12 @@
               </a:spcBef>
               <a:defRPr sz="950">
                 <a:solidFill>
-                  <a:srgbClr val="334155"/>
-                </a:solidFill>
-              </a:defRPr>
-            </a:pPr>
-            <a:r>
-              <a:t>• 마케팅허브(MarketingHub) 심의 의뢰 수신 &amp; 결과(HTML/JSON) 웹훅 회신</a:t>
+                  <a:srgbClr val="1E3A5F"/>
+                </a:solidFill>
+              </a:defRPr>
+            </a:pPr>
+            <a:r>
+              <a:t>• 전자구매포털(SRM-Portal) 검증 요청 수신 &amp; 결과(HTML/JSON) 웹훅 회신</a:t>
             </a:r>
           </a:p>
           <a:p>
@@ -7040,12 +7040,12 @@
               </a:spcBef>
               <a:defRPr sz="950">
                 <a:solidFill>
-                  <a:srgbClr val="334155"/>
-                </a:solidFill>
-              </a:defRPr>
-            </a:pPr>
-            <a:r>
-              <a:t>• 프로덕트랩(ProductLab) 전성분·임상/설문 실증보고서 일배치 연계</a:t>
+                  <a:srgbClr val="1E3A5F"/>
+                </a:solidFill>
+              </a:defRPr>
+            </a:pPr>
+            <a:r>
+              <a:t>• 피엘엠넥서스(PLM-Nexus) 자재BOM·신뢰성/설문 시험검증보고서 일배치 연계</a:t>
             </a:r>
           </a:p>
           <a:p>
@@ -7055,12 +7055,12 @@
               </a:spcBef>
               <a:defRPr sz="950">
                 <a:solidFill>
-                  <a:srgbClr val="334155"/>
-                </a:solidFill>
-              </a:defRPr>
-            </a:pPr>
-            <a:r>
-              <a:t>• 연구원 실증자료 업로드 요청 이메일(SMTP) 발송 연동</a:t>
+                  <a:srgbClr val="1E3A5F"/>
+                </a:solidFill>
+              </a:defRPr>
+            </a:pPr>
+            <a:r>
+              <a:t>• 연구원 시험성적서 업로드 요청 이메일(SMTP) 발송 연동</a:t>
             </a:r>
           </a:p>
           <a:p>
@@ -7070,12 +7070,12 @@
               </a:spcBef>
               <a:defRPr sz="950">
                 <a:solidFill>
-                  <a:srgbClr val="334155"/>
-                </a:solidFill>
-              </a:defRPr>
-            </a:pPr>
-            <a:r>
-              <a:t>• 비학습 상용 LLM(Claude/GPT) &amp; 네이버 클로바 OCR(:443) 연동</a:t>
+                  <a:srgbClr val="1E3A5F"/>
+                </a:solidFill>
+              </a:defRPr>
+            </a:pPr>
+            <a:r>
+              <a:t>• 비학습 상용 LLM(Claude/GPT) &amp; 엔터프라이즈 비전 OCR(:443) 연동</a:t>
             </a:r>
           </a:p>
         </p:txBody>
@@ -7173,7 +7173,7 @@
               </a:defRPr>
             </a:pPr>
             <a:r>
-              <a:t>SyncGuard AI 시스템 이행계획서  &gt;  5. 데이터 마이그레이션</a:t>
+              <a:t>SyncFlow AI 시스템 이행계획서  &gt;  5. 데이터 마이그레이션</a:t>
             </a:r>
           </a:p>
         </p:txBody>
@@ -7238,7 +7238,7 @@
             <a:pPr algn="r">
               <a:defRPr sz="1000" b="1">
                 <a:solidFill>
-                  <a:srgbClr val="1E293B"/>
+                  <a:srgbClr val="0F2942"/>
                 </a:solidFill>
               </a:defRPr>
             </a:pPr>
@@ -7323,7 +7323,7 @@
               </a:defRPr>
             </a:pPr>
             <a:r>
-              <a:t>SyncGuard AI | 시스템 오픈 및 상용 전환 이행계획서</a:t>
+              <a:t>SyncFlow AI | 시스템 오픈 및 상용 전환 이행계획서</a:t>
             </a:r>
           </a:p>
         </p:txBody>
@@ -7550,7 +7550,7 @@
                         </a:defRPr>
                       </a:pPr>
                       <a:r>
-                        <a:t>금지어/주의어 룰셋</a:t>
+                        <a:t>독소조항/보완조항 룰셋</a:t>
                       </a:r>
                     </a:p>
                   </a:txBody>
@@ -7568,12 +7568,12 @@
                       <a:pPr>
                         <a:defRPr sz="950">
                           <a:solidFill>
-                            <a:srgbClr val="334155"/>
+                            <a:srgbClr val="1E3A5F"/>
                           </a:solidFill>
                         </a:defRPr>
                       </a:pPr>
                       <a:r>
-                        <a:t>review_prohibited_word</a:t>
+                        <a:t>verify_prohibited_word</a:t>
                       </a:r>
                     </a:p>
                   </a:txBody>
@@ -7591,12 +7591,12 @@
                       <a:pPr>
                         <a:defRPr sz="950">
                           <a:solidFill>
-                            <a:srgbClr val="334155"/>
+                            <a:srgbClr val="1E3A5F"/>
                           </a:solidFill>
                         </a:defRPr>
                       </a:pPr>
                       <a:r>
-                        <a:t>식약처 고시 기반 100개 규칙 사전 전수 적재</a:t>
+                        <a:t>공정위·표준원 고시 기반 100개 규칙 사전 전수 적재</a:t>
                       </a:r>
                     </a:p>
                   </a:txBody>
@@ -7614,7 +7614,7 @@
                       <a:pPr algn="ctr">
                         <a:defRPr sz="950">
                           <a:solidFill>
-                            <a:srgbClr val="334155"/>
+                            <a:srgbClr val="1E3A5F"/>
                           </a:solidFill>
                         </a:defRPr>
                       </a:pPr>
@@ -7667,7 +7667,7 @@
                         </a:defRPr>
                       </a:pPr>
                       <a:r>
-                        <a:t>대체 추천 문구 DB</a:t>
+                        <a:t>대체 추천 조항 DB</a:t>
                       </a:r>
                     </a:p>
                   </a:txBody>
@@ -7685,12 +7685,12 @@
                       <a:pPr>
                         <a:defRPr sz="950">
                           <a:solidFill>
-                            <a:srgbClr val="334155"/>
+                            <a:srgbClr val="1E3A5F"/>
                           </a:solidFill>
                         </a:defRPr>
                       </a:pPr>
                       <a:r>
-                        <a:t>review_prohibited_word (recommended_phrases)</a:t>
+                        <a:t>verify_prohibited_word (recommended_phrases)</a:t>
                       </a:r>
                     </a:p>
                   </a:txBody>
@@ -7708,12 +7708,12 @@
                       <a:pPr>
                         <a:defRPr sz="950">
                           <a:solidFill>
-                            <a:srgbClr val="334155"/>
+                            <a:srgbClr val="1E3A5F"/>
                           </a:solidFill>
                         </a:defRPr>
                       </a:pPr>
                       <a:r>
-                        <a:t>허위·과대 표현 대체 추천 문구 100종</a:t>
+                        <a:t>허위·과대 표현 대체 추천 조항 100종</a:t>
                       </a:r>
                     </a:p>
                   </a:txBody>
@@ -7731,7 +7731,7 @@
                       <a:pPr algn="ctr">
                         <a:defRPr sz="950">
                           <a:solidFill>
-                            <a:srgbClr val="334155"/>
+                            <a:srgbClr val="1E3A5F"/>
                           </a:solidFill>
                         </a:defRPr>
                       </a:pPr>
@@ -7784,7 +7784,7 @@
                         </a:defRPr>
                       </a:pPr>
                       <a:r>
-                        <a:t>식약처 가이드라인 RAG</a:t>
+                        <a:t>공정위·표준원 가이드라인 RAG</a:t>
                       </a:r>
                     </a:p>
                   </a:txBody>
@@ -7802,12 +7802,12 @@
                       <a:pPr>
                         <a:defRPr sz="950">
                           <a:solidFill>
-                            <a:srgbClr val="334155"/>
+                            <a:srgbClr val="1E3A5F"/>
                           </a:solidFill>
                         </a:defRPr>
                       </a:pPr>
                       <a:r>
-                        <a:t>review_regulation_doc / review_regulation_chunk</a:t>
+                        <a:t>verify_regulation_doc / verify_regulation_chunk</a:t>
                       </a:r>
                     </a:p>
                   </a:txBody>
@@ -7825,12 +7825,12 @@
                       <a:pPr>
                         <a:defRPr sz="950">
                           <a:solidFill>
-                            <a:srgbClr val="334155"/>
+                            <a:srgbClr val="1E3A5F"/>
                           </a:solidFill>
                         </a:defRPr>
                       </a:pPr>
                       <a:r>
-                        <a:t>표시·광고 공정화법 제3조, 표시광고 가이드라인 전문</a:t>
+                        <a:t>하도급법 제3조의4, 계약·기술규격 가이드라인 전문</a:t>
                       </a:r>
                     </a:p>
                   </a:txBody>
@@ -7848,7 +7848,7 @@
                       <a:pPr algn="ctr">
                         <a:defRPr sz="950">
                           <a:solidFill>
-                            <a:srgbClr val="334155"/>
+                            <a:srgbClr val="1E3A5F"/>
                           </a:solidFill>
                         </a:defRPr>
                       </a:pPr>
@@ -7919,12 +7919,12 @@
                       <a:pPr>
                         <a:defRPr sz="950">
                           <a:solidFill>
-                            <a:srgbClr val="334155"/>
+                            <a:srgbClr val="1E3A5F"/>
                           </a:solidFill>
                         </a:defRPr>
                       </a:pPr>
                       <a:r>
-                        <a:t>review_golden_set</a:t>
+                        <a:t>verify_golden_set</a:t>
                       </a:r>
                     </a:p>
                   </a:txBody>
@@ -7942,7 +7942,7 @@
                       <a:pPr>
                         <a:defRPr sz="950">
                           <a:solidFill>
-                            <a:srgbClr val="334155"/>
+                            <a:srgbClr val="1E3A5F"/>
                           </a:solidFill>
                         </a:defRPr>
                       </a:pPr>
@@ -7965,7 +7965,7 @@
                       <a:pPr algn="ctr">
                         <a:defRPr sz="950">
                           <a:solidFill>
-                            <a:srgbClr val="334155"/>
+                            <a:srgbClr val="1E3A5F"/>
                           </a:solidFill>
                         </a:defRPr>
                       </a:pPr>
@@ -8036,12 +8036,12 @@
                       <a:pPr>
                         <a:defRPr sz="950">
                           <a:solidFill>
-                            <a:srgbClr val="334155"/>
+                            <a:srgbClr val="1E3A5F"/>
                           </a:solidFill>
                         </a:defRPr>
                       </a:pPr>
                       <a:r>
-                        <a:t>sys_user, sys_role, review_brand_guideline</a:t>
+                        <a:t>sys_user, sys_role, verify_brand_guideline</a:t>
                       </a:r>
                     </a:p>
                   </a:txBody>
@@ -8059,12 +8059,12 @@
                       <a:pPr>
                         <a:defRPr sz="950">
                           <a:solidFill>
-                            <a:srgbClr val="334155"/>
+                            <a:srgbClr val="1E3A5F"/>
                           </a:solidFill>
                         </a:defRPr>
                       </a:pPr>
                       <a:r>
-                        <a:t>공통 코드 12종, 11개 브랜드, 18명 사용자</a:t>
+                        <a:t>공통 코드 12종, 11개 사업본부, 18명 사용자</a:t>
                       </a:r>
                     </a:p>
                   </a:txBody>
@@ -8082,7 +8082,7 @@
                       <a:pPr algn="ctr">
                         <a:defRPr sz="950">
                           <a:solidFill>
-                            <a:srgbClr val="334155"/>
+                            <a:srgbClr val="1E3A5F"/>
                           </a:solidFill>
                         </a:defRPr>
                       </a:pPr>
@@ -8218,7 +8218,7 @@
               </a:defRPr>
             </a:pPr>
             <a:r>
-              <a:t>SyncGuard AI 시스템 이행계획서  &gt;  6. 롤백 및 비상대책</a:t>
+              <a:t>SyncFlow AI 시스템 이행계획서  &gt;  6. 롤백 및 비상대책</a:t>
             </a:r>
           </a:p>
         </p:txBody>
@@ -8283,7 +8283,7 @@
             <a:pPr algn="r">
               <a:defRPr sz="1000" b="1">
                 <a:solidFill>
-                  <a:srgbClr val="1E293B"/>
+                  <a:srgbClr val="0F2942"/>
                 </a:solidFill>
               </a:defRPr>
             </a:pPr>
@@ -8368,7 +8368,7 @@
               </a:defRPr>
             </a:pPr>
             <a:r>
-              <a:t>SyncGuard AI | 시스템 오픈 및 상용 전환 이행계획서</a:t>
+              <a:t>SyncFlow AI | 시스템 오픈 및 상용 전환 이행계획서</a:t>
             </a:r>
           </a:p>
         </p:txBody>
@@ -8524,7 +8524,7 @@
               </a:spcBef>
               <a:defRPr sz="950">
                 <a:solidFill>
-                  <a:srgbClr val="334155"/>
+                  <a:srgbClr val="1E3A5F"/>
                 </a:solidFill>
               </a:defRPr>
             </a:pPr>
@@ -8539,12 +8539,12 @@
               </a:spcBef>
               <a:defRPr sz="950">
                 <a:solidFill>
-                  <a:srgbClr val="334155"/>
-                </a:solidFill>
-              </a:defRPr>
-            </a:pPr>
-            <a:r>
-              <a:t>• 핵심 기능(심의 접수/AI 판정) 스모크 테스트 실패율 5% 초과 시</a:t>
+                  <a:srgbClr val="1E3A5F"/>
+                </a:solidFill>
+              </a:defRPr>
+            </a:pPr>
+            <a:r>
+              <a:t>• 핵심 기능(검증 접수/AI 판정) 스모크 테스트 실패율 5% 초과 시</a:t>
             </a:r>
           </a:p>
           <a:p>
@@ -8554,12 +8554,12 @@
               </a:spcBef>
               <a:defRPr sz="950">
                 <a:solidFill>
-                  <a:srgbClr val="334155"/>
-                </a:solidFill>
-              </a:defRPr>
-            </a:pPr>
-            <a:r>
-              <a:t>• 외부 시스템(ProductLab/SSO) 연계가 1시간 이상 복구 불가할 시</a:t>
+                  <a:srgbClr val="1E3A5F"/>
+                </a:solidFill>
+              </a:defRPr>
+            </a:pPr>
+            <a:r>
+              <a:t>• 외부 시스템(PLM-Nexus/SSO) 연계가 1시간 이상 복구 불가할 시</a:t>
             </a:r>
           </a:p>
           <a:p>
@@ -8569,7 +8569,7 @@
               </a:spcBef>
               <a:defRPr sz="950">
                 <a:solidFill>
-                  <a:srgbClr val="334155"/>
+                  <a:srgbClr val="1E3A5F"/>
                 </a:solidFill>
               </a:defRPr>
             </a:pPr>
@@ -8664,7 +8664,7 @@
               </a:spcBef>
               <a:defRPr sz="950">
                 <a:solidFill>
-                  <a:srgbClr val="334155"/>
+                  <a:srgbClr val="1E3A5F"/>
                 </a:solidFill>
               </a:defRPr>
             </a:pPr>
@@ -8679,7 +8679,7 @@
               </a:spcBef>
               <a:defRPr sz="950">
                 <a:solidFill>
-                  <a:srgbClr val="334155"/>
+                  <a:srgbClr val="1E3A5F"/>
                 </a:solidFill>
               </a:defRPr>
             </a:pPr>
@@ -8694,7 +8694,7 @@
               </a:spcBef>
               <a:defRPr sz="950">
                 <a:solidFill>
-                  <a:srgbClr val="334155"/>
+                  <a:srgbClr val="1E3A5F"/>
                 </a:solidFill>
               </a:defRPr>
             </a:pPr>
@@ -8709,7 +8709,7 @@
               </a:spcBef>
               <a:defRPr sz="950">
                 <a:solidFill>
-                  <a:srgbClr val="334155"/>
+                  <a:srgbClr val="1E3A5F"/>
                 </a:solidFill>
               </a:defRPr>
             </a:pPr>
@@ -8804,12 +8804,12 @@
               </a:spcBef>
               <a:defRPr sz="950">
                 <a:solidFill>
-                  <a:srgbClr val="334155"/>
-                </a:solidFill>
-              </a:defRPr>
-            </a:pPr>
-            <a:r>
-              <a:t>• 시스템 오픈 연기 시 기존 사내 이메일/오프라인 심의 즉시 유지</a:t>
+                  <a:srgbClr val="1E3A5F"/>
+                </a:solidFill>
+              </a:defRPr>
+            </a:pPr>
+            <a:r>
+              <a:t>• 시스템 오픈 연기 시 기존 사내 이메일/오프라인 검증 즉시 유지</a:t>
             </a:r>
           </a:p>
           <a:p>
@@ -8819,7 +8819,7 @@
               </a:spcBef>
               <a:defRPr sz="950">
                 <a:solidFill>
-                  <a:srgbClr val="334155"/>
+                  <a:srgbClr val="1E3A5F"/>
                 </a:solidFill>
               </a:defRPr>
             </a:pPr>
@@ -8834,12 +8834,12 @@
               </a:spcBef>
               <a:defRPr sz="950">
                 <a:solidFill>
-                  <a:srgbClr val="334155"/>
-                </a:solidFill>
-              </a:defRPr>
-            </a:pPr>
-            <a:r>
-              <a:t>• 마케팅 실무 부서에 오픈 일정 변경 비상 공지 발송</a:t>
+                  <a:srgbClr val="1E3A5F"/>
+                </a:solidFill>
+              </a:defRPr>
+            </a:pPr>
+            <a:r>
+              <a:t>• 구매조달 실무 부서에 오픈 일정 변경 비상 공지 발송</a:t>
             </a:r>
           </a:p>
         </p:txBody>
@@ -8929,7 +8929,7 @@
               </a:spcBef>
               <a:defRPr sz="950">
                 <a:solidFill>
-                  <a:srgbClr val="334155"/>
+                  <a:srgbClr val="1E3A5F"/>
                 </a:solidFill>
               </a:defRPr>
             </a:pPr>
@@ -8944,7 +8944,7 @@
               </a:spcBef>
               <a:defRPr sz="950">
                 <a:solidFill>
-                  <a:srgbClr val="334155"/>
+                  <a:srgbClr val="1E3A5F"/>
                 </a:solidFill>
               </a:defRPr>
             </a:pPr>
@@ -8959,7 +8959,7 @@
               </a:spcBef>
               <a:defRPr sz="950">
                 <a:solidFill>
-                  <a:srgbClr val="334155"/>
+                  <a:srgbClr val="1E3A5F"/>
                 </a:solidFill>
               </a:defRPr>
             </a:pPr>
@@ -9062,7 +9062,7 @@
               </a:defRPr>
             </a:pPr>
             <a:r>
-              <a:t>SyncGuard AI 시스템 이행계획서  &gt;  7. 완료 승인</a:t>
+              <a:t>SyncFlow AI 시스템 이행계획서  &gt;  7. 완료 승인</a:t>
             </a:r>
           </a:p>
         </p:txBody>
@@ -9127,7 +9127,7 @@
             <a:pPr algn="r">
               <a:defRPr sz="1000" b="1">
                 <a:solidFill>
-                  <a:srgbClr val="1E293B"/>
+                  <a:srgbClr val="0F2942"/>
                 </a:solidFill>
               </a:defRPr>
             </a:pPr>
@@ -9212,7 +9212,7 @@
               </a:defRPr>
             </a:pPr>
             <a:r>
-              <a:t>SyncGuard AI | 시스템 오픈 및 상용 전환 이행계획서</a:t>
+              <a:t>SyncFlow AI | 시스템 오픈 및 상용 전환 이행계획서</a:t>
             </a:r>
           </a:p>
         </p:txBody>
@@ -9368,12 +9368,12 @@
               </a:spcBef>
               <a:defRPr sz="1000">
                 <a:solidFill>
-                  <a:srgbClr val="334155"/>
-                </a:solidFill>
-              </a:defRPr>
-            </a:pPr>
-            <a:r>
-              <a:t>본 이행계획서에 명시된 컷오버 시나리오 및 스모크 테스트 항목 42개 전수가 100% 정상 통과되었으며, ProductLab 및 MarketingHub을 포함한 사내 4대 외부 시스템과의 인터페이스 연계 무결성이 확인되었기에 본 시스템의 상용 오픈 이행 완료를 정식으로 승인합니다.</a:t>
+                  <a:srgbClr val="1E3A5F"/>
+                </a:solidFill>
+              </a:defRPr>
+            </a:pPr>
+            <a:r>
+              <a:t>본 이행계획서에 명시된 컷오버 시나리오 및 스모크 테스트 항목 42개 전수가 100% 정상 통과되었으며, PLM-Nexus 및 SRM-Portal을 포함한 사내 4대 외부 시스템과의 인터페이스 연계 무결성이 확인되었기에 본 시스템의 상용 오픈 이행 완료를 정식으로 승인합니다.</a:t>
             </a:r>
           </a:p>
           <a:p>
@@ -9478,7 +9478,7 @@
               </a:spcBef>
               <a:defRPr sz="1000">
                 <a:solidFill>
-                  <a:srgbClr val="334155"/>
+                  <a:srgbClr val="1E3A5F"/>
                 </a:solidFill>
               </a:defRPr>
             </a:pPr>
@@ -9487,7 +9487,7 @@
             </a:r>
             <a:br/>
             <a:r>
-              <a:t>RA팀 검수책임관</a:t>
+              <a:t>QA팀 검수책임관</a:t>
             </a:r>
             <a:br/>
             <a:br/>
@@ -9582,7 +9582,7 @@
               </a:spcBef>
               <a:defRPr sz="1000">
                 <a:solidFill>
-                  <a:srgbClr val="334155"/>
+                  <a:srgbClr val="1E3A5F"/>
                 </a:solidFill>
               </a:defRPr>
             </a:pPr>
@@ -9686,7 +9686,7 @@
               </a:spcBef>
               <a:defRPr sz="1000">
                 <a:solidFill>
-                  <a:srgbClr val="334155"/>
+                  <a:srgbClr val="1E3A5F"/>
                 </a:solidFill>
               </a:defRPr>
             </a:pPr>
